--- a/docs/viva/FYP_Viva_Deck.pptx
+++ b/docs/viva/FYP_Viva_Deck.pptx
@@ -13728,7 +13728,7 @@
                 </a:solidFill>
                 <a:latin typeface="Calibri"/>
               </a:rPr>
-              <a:t>560 automated tests, plus gates that assert the report's numbers against the artifacts.</a:t>
+              <a:t>An automated suite of several hundred tests, plus gates that assert the report's numbers against the artifacts.</a:t>
             </a:r>
           </a:p>
         </p:txBody>
